--- a/data/employees/EMP059/AST-EMP059-01.pptx
+++ b/data/employees/EMP059/AST-EMP059-01.pptx
@@ -9,6 +9,7 @@
     <p:sldId id="257" r:id="rId8"/>
     <p:sldId id="258" r:id="rId9"/>
     <p:sldId id="259" r:id="rId10"/>
+    <p:sldId id="260" r:id="rId11"/>
   </p:sldIdLst>
   <p:sldSz cx="9144000" cy="6858000" type="screen4x3"/>
   <p:notesSz cx="6858000" cy="9144000"/>
@@ -3098,42 +3099,55 @@
             <a:spLocks noGrp="1"/>
           </p:cNvSpPr>
           <p:nvPr>
-            <p:ph type="ctrTitle"/>
-          </p:nvPr>
-        </p:nvSpPr>
-        <p:spPr/>
-        <p:txBody>
-          <a:bodyPr/>
-          <a:lstStyle/>
-          <a:p>
-            <a:r>
-              <a:t>Project update deck - EMP059</a:t>
-            </a:r>
-          </a:p>
-        </p:txBody>
-      </p:sp>
-      <p:sp>
-        <p:nvSpPr>
-          <p:cNvPr id="3" name="Subtitle 2"/>
-          <p:cNvSpPr>
-            <a:spLocks noGrp="1"/>
-          </p:cNvSpPr>
-          <p:nvPr>
-            <p:ph type="subTitle" idx="1"/>
-          </p:nvPr>
-        </p:nvSpPr>
-        <p:spPr/>
-        <p:txBody>
-          <a:bodyPr/>
-          <a:lstStyle/>
-          <a:p>
-            <a:r>
-              <a:t>Drew Kim | Lead | IT</a:t>
-            </a:r>
-          </a:p>
-          <a:p>
-            <a:r>
-              <a:t>Prepared: 2025-03-02</a:t>
+            <p:ph type="title"/>
+          </p:nvPr>
+        </p:nvSpPr>
+        <p:spPr/>
+        <p:txBody>
+          <a:bodyPr/>
+          <a:lstStyle/>
+          <a:p>
+            <a:r>
+              <a:t>Ast Emp059 01 - EMP059</a:t>
+            </a:r>
+          </a:p>
+        </p:txBody>
+      </p:sp>
+      <p:sp>
+        <p:nvSpPr>
+          <p:cNvPr id="3" name="Content Placeholder 2"/>
+          <p:cNvSpPr>
+            <a:spLocks noGrp="1"/>
+          </p:cNvSpPr>
+          <p:nvPr>
+            <p:ph idx="1"/>
+          </p:nvPr>
+        </p:nvSpPr>
+        <p:spPr/>
+        <p:txBody>
+          <a:bodyPr/>
+          <a:lstStyle/>
+          <a:p>
+            <a:r>
+              <a:t>Slide 1: Executive Summary</a:t>
+            </a:r>
+          </a:p>
+          <a:p>
+            <a:pPr lvl="1"/>
+            <a:r>
+              <a:t>Section 1: Quarterly delivery milestones. EMP059 contributes to ast emp059 01 through recurring collaboration, clear ownership boundaries, and measurable outcomes. The team captures decisions, open issues, and handoffs so that knowledge remains discoverable for future programs.</a:t>
+            </a:r>
+          </a:p>
+          <a:p>
+            <a:pPr lvl="1"/>
+            <a:r>
+              <a:t>Section 2: Fabric semantic model planning. EMP059 contributes to ast emp059 01 through recurring collaboration, clear ownership boundaries, and measurable outcomes. The team captures decisions, open issues, and handoffs so that knowledge remains discoverable for future programs.</a:t>
+            </a:r>
+          </a:p>
+          <a:p>
+            <a:pPr lvl="1"/>
+            <a:r>
+              <a:t>Section 3: Automation backlog refinement. EMP059 contributes to ast emp059 01 through recurring collaboration, clear ownership boundaries, and measurable outcomes. The team captures decisions, open issues, and handoffs so that knowledge remains discoverable for future programs.</a:t>
             </a:r>
           </a:p>
         </p:txBody>
@@ -3172,7 +3186,7 @@
           <a:lstStyle/>
           <a:p>
             <a:r>
-              <a:t>Infrastructure Utilisation Dashboard</a:t>
+              <a:t>Ast Emp059 01 - EMP059</a:t>
             </a:r>
           </a:p>
         </p:txBody>
@@ -3193,17 +3207,25 @@
           <a:lstStyle/>
           <a:p>
             <a:r>
-              <a:t>Overview of Infrastructure Utilisation Dashboard for IT department.</a:t>
-            </a:r>
-          </a:p>
-          <a:p>
-            <a:r>
-              <a:t>Responsible: Drew Kim (Lead)</a:t>
-            </a:r>
-          </a:p>
-          <a:p>
-            <a:r>
-              <a:t>Location: Portland | Skills: Synapse, Python, Power BI, Fabric</a:t>
+              <a:t>Slide 2: Executive Summary</a:t>
+            </a:r>
+          </a:p>
+          <a:p>
+            <a:pPr lvl="1"/>
+            <a:r>
+              <a:t>Section 1: Operational risk review. EMP059 contributes to ast emp059 01 through recurring collaboration, clear ownership boundaries, and measurable outcomes. The team captures decisions, open issues, and handoffs so that knowledge remains discoverable for future programs.</a:t>
+            </a:r>
+          </a:p>
+          <a:p>
+            <a:pPr lvl="1"/>
+            <a:r>
+              <a:t>Section 2: Automation backlog refinement. EMP059 contributes to ast emp059 01 through recurring collaboration, clear ownership boundaries, and measurable outcomes. The team captures decisions, open issues, and handoffs so that knowledge remains discoverable for future programs.</a:t>
+            </a:r>
+          </a:p>
+          <a:p>
+            <a:pPr lvl="1"/>
+            <a:r>
+              <a:t>Section 3: Operational risk review. EMP059 contributes to ast emp059 01 through recurring collaboration, clear ownership boundaries, and measurable outcomes. The team captures decisions, open issues, and handoffs so that knowledge remains discoverable for future programs.</a:t>
             </a:r>
           </a:p>
         </p:txBody>
@@ -3242,7 +3264,7 @@
           <a:lstStyle/>
           <a:p>
             <a:r>
-              <a:t>Security Patch Status</a:t>
+              <a:t>Ast Emp059 01 - EMP059</a:t>
             </a:r>
           </a:p>
         </p:txBody>
@@ -3263,17 +3285,25 @@
           <a:lstStyle/>
           <a:p>
             <a:r>
-              <a:t>Overview of Security Patch Status for IT department.</a:t>
-            </a:r>
-          </a:p>
-          <a:p>
-            <a:r>
-              <a:t>Responsible: Drew Kim (Lead)</a:t>
-            </a:r>
-          </a:p>
-          <a:p>
-            <a:r>
-              <a:t>Location: Portland | Skills: Synapse, Python, Power BI, Fabric</a:t>
+              <a:t>Slide 3: Executive Summary</a:t>
+            </a:r>
+          </a:p>
+          <a:p>
+            <a:pPr lvl="1"/>
+            <a:r>
+              <a:t>Section 1: Quarterly delivery milestones. EMP059 contributes to ast emp059 01 through recurring collaboration, clear ownership boundaries, and measurable outcomes. The team captures decisions, open issues, and handoffs so that knowledge remains discoverable for future programs.</a:t>
+            </a:r>
+          </a:p>
+          <a:p>
+            <a:pPr lvl="1"/>
+            <a:r>
+              <a:t>Section 2: Data quality remediation. EMP059 contributes to ast emp059 01 through recurring collaboration, clear ownership boundaries, and measurable outcomes. The team captures decisions, open issues, and handoffs so that knowledge remains discoverable for future programs.</a:t>
+            </a:r>
+          </a:p>
+          <a:p>
+            <a:pPr lvl="1"/>
+            <a:r>
+              <a:t>Section 3: Knowledge transfer and onboarding. EMP059 contributes to ast emp059 01 through recurring collaboration, clear ownership boundaries, and measurable outcomes. The team captures decisions, open issues, and handoffs so that knowledge remains discoverable for future programs.</a:t>
             </a:r>
           </a:p>
         </p:txBody>
@@ -3312,7 +3342,7 @@
           <a:lstStyle/>
           <a:p>
             <a:r>
-              <a:t>Cloud Cost Optimisation</a:t>
+              <a:t>Ast Emp059 01 - EMP059</a:t>
             </a:r>
           </a:p>
         </p:txBody>
@@ -3333,17 +3363,103 @@
           <a:lstStyle/>
           <a:p>
             <a:r>
-              <a:t>Overview of Cloud Cost Optimisation for IT department.</a:t>
-            </a:r>
-          </a:p>
-          <a:p>
-            <a:r>
-              <a:t>Responsible: Drew Kim (Lead)</a:t>
-            </a:r>
-          </a:p>
-          <a:p>
-            <a:r>
-              <a:t>Location: Portland | Skills: Synapse, Python, Power BI, Fabric</a:t>
+              <a:t>Slide 4: Executive Summary</a:t>
+            </a:r>
+          </a:p>
+          <a:p>
+            <a:pPr lvl="1"/>
+            <a:r>
+              <a:t>Section 1: Customer escalation analysis. EMP059 contributes to ast emp059 01 through recurring collaboration, clear ownership boundaries, and measurable outcomes. The team captures decisions, open issues, and handoffs so that knowledge remains discoverable for future programs.</a:t>
+            </a:r>
+          </a:p>
+          <a:p>
+            <a:pPr lvl="1"/>
+            <a:r>
+              <a:t>Section 2: Fabric semantic model planning. EMP059 contributes to ast emp059 01 through recurring collaboration, clear ownership boundaries, and measurable outcomes. The team captures decisions, open issues, and handoffs so that knowledge remains discoverable for future programs.</a:t>
+            </a:r>
+          </a:p>
+          <a:p>
+            <a:pPr lvl="1"/>
+            <a:r>
+              <a:t>Section 3: Department KPI performance. EMP059 contributes to ast emp059 01 through recurring collaboration, clear ownership boundaries, and measurable outcomes. The team captures decisions, open issues, and handoffs so that knowledge remains discoverable for future programs.</a:t>
+            </a:r>
+          </a:p>
+        </p:txBody>
+      </p:sp>
+    </p:spTree>
+  </p:cSld>
+  <p:clrMapOvr>
+    <a:masterClrMapping/>
+  </p:clrMapOvr>
+</p:sld>
+</file>
+
+<file path=ppt/slides/slide5.xml><?xml version="1.0" encoding="utf-8"?>
+<p:sld xmlns:a="http://schemas.openxmlformats.org/drawingml/2006/main" xmlns:p="http://schemas.openxmlformats.org/presentationml/2006/main" xmlns:r="http://schemas.openxmlformats.org/officeDocument/2006/relationships">
+  <p:cSld>
+    <p:spTree>
+      <p:nvGrpSpPr>
+        <p:cNvPr id="1" name=""/>
+        <p:cNvGrpSpPr/>
+        <p:nvPr/>
+      </p:nvGrpSpPr>
+      <p:grpSpPr/>
+      <p:sp>
+        <p:nvSpPr>
+          <p:cNvPr id="2" name="Title 1"/>
+          <p:cNvSpPr>
+            <a:spLocks noGrp="1"/>
+          </p:cNvSpPr>
+          <p:nvPr>
+            <p:ph type="title"/>
+          </p:nvPr>
+        </p:nvSpPr>
+        <p:spPr/>
+        <p:txBody>
+          <a:bodyPr/>
+          <a:lstStyle/>
+          <a:p>
+            <a:r>
+              <a:t>Ast Emp059 01 - EMP059</a:t>
+            </a:r>
+          </a:p>
+        </p:txBody>
+      </p:sp>
+      <p:sp>
+        <p:nvSpPr>
+          <p:cNvPr id="3" name="Content Placeholder 2"/>
+          <p:cNvSpPr>
+            <a:spLocks noGrp="1"/>
+          </p:cNvSpPr>
+          <p:nvPr>
+            <p:ph idx="1"/>
+          </p:nvPr>
+        </p:nvSpPr>
+        <p:spPr/>
+        <p:txBody>
+          <a:bodyPr/>
+          <a:lstStyle/>
+          <a:p>
+            <a:r>
+              <a:t>Slide 5: Executive Summary</a:t>
+            </a:r>
+          </a:p>
+          <a:p>
+            <a:pPr lvl="1"/>
+            <a:r>
+              <a:t>Section 1: Data quality remediation. EMP059 contributes to ast emp059 01 through recurring collaboration, clear ownership boundaries, and measurable outcomes. The team captures decisions, open issues, and handoffs so that knowledge remains discoverable for future programs.</a:t>
+            </a:r>
+          </a:p>
+          <a:p>
+            <a:pPr lvl="1"/>
+            <a:r>
+              <a:t>Section 2: Fabric semantic model planning. EMP059 contributes to ast emp059 01 through recurring collaboration, clear ownership boundaries, and measurable outcomes. The team captures decisions, open issues, and handoffs so that knowledge remains discoverable for future programs.</a:t>
+            </a:r>
+          </a:p>
+          <a:p>
+            <a:pPr lvl="1"/>
+            <a:r>
+              <a:t>Section 3: Knowledge transfer and onboarding. EMP059 contributes to ast emp059 01 through recurring collaboration, clear ownership boundaries, and measurable outcomes. The team captures decisions, open issues, and handoffs so that knowledge remains discoverable for future programs.</a:t>
             </a:r>
           </a:p>
         </p:txBody>
